--- a/画图/E2E结果_全配体.pptx
+++ b/画图/E2E结果_全配体.pptx
@@ -107,6 +107,11 @@
       </a:defRPr>
     </a:lvl9pPr>
   </p:defaultTextStyle>
+  <p:extLst>
+    <p:ext uri="{EFAFB233-063F-42B5-8137-9DF3F51BA10A}">
+      <p15:sldGuideLst xmlns:p15="http://schemas.microsoft.com/office/powerpoint/2012/main"/>
+    </p:ext>
+  </p:extLst>
 </p:presentation>
 </file>
 
@@ -549,111 +554,115 @@
           <a:lstStyle/>
           <a:p>
             <a:r>
-              <a:rPr lang="zh-CN" altLang="en-US"/>
+              <a:rPr lang="zh-CN" altLang="en-US" dirty="0"/>
               <a:t>图 </a:t>
             </a:r>
             <a:r>
-              <a:rPr lang="en-US" altLang="zh-CN"/>
+              <a:rPr lang="en-US" altLang="zh-CN" dirty="0"/>
               <a:t>10</a:t>
             </a:r>
             <a:r>
-              <a:rPr lang="zh-CN" altLang="en-US"/>
+              <a:rPr lang="zh-CN" altLang="en-US" dirty="0"/>
               <a:t>｜一般配体的区域检出与化学身份识别。</a:t>
             </a:r>
             <a:r>
-              <a:rPr lang="en-US" altLang="zh-CN"/>
+              <a:rPr lang="en-US" altLang="zh-CN" dirty="0"/>
               <a:t>179 </a:t>
             </a:r>
             <a:r>
-              <a:rPr lang="zh-CN" altLang="en-US"/>
+              <a:rPr lang="zh-CN" altLang="en-US" dirty="0"/>
               <a:t>个 </a:t>
             </a:r>
             <a:r>
-              <a:rPr lang="en-US" altLang="zh-CN"/>
+              <a:rPr lang="en-US" altLang="zh-CN" dirty="0"/>
               <a:t>PDB </a:t>
             </a:r>
             <a:r>
-              <a:rPr lang="zh-CN" altLang="en-US"/>
+              <a:rPr lang="zh-CN" altLang="en-US" dirty="0"/>
               <a:t>中，前 </a:t>
             </a:r>
             <a:r>
-              <a:rPr lang="en-US" altLang="zh-CN"/>
+              <a:rPr lang="en-US" altLang="zh-CN" dirty="0"/>
               <a:t>K </a:t>
             </a:r>
             <a:r>
-              <a:rPr lang="zh-CN" altLang="en-US"/>
+              <a:rPr lang="zh-CN" altLang="en-US" dirty="0"/>
               <a:t>个排序候选至少有一个区域命中时计为 </a:t>
             </a:r>
             <a:r>
-              <a:rPr lang="en-US" altLang="zh-CN"/>
+              <a:rPr lang="en-US" altLang="zh-CN" dirty="0"/>
               <a:t>Find </a:t>
             </a:r>
             <a:r>
-              <a:rPr lang="zh-CN" altLang="en-US"/>
+              <a:rPr lang="zh-CN" altLang="en-US" dirty="0"/>
               <a:t>成功；同时具有正确精确 </a:t>
             </a:r>
             <a:r>
-              <a:rPr lang="en-US" altLang="zh-CN"/>
+              <a:rPr lang="en-US" altLang="zh-CN" dirty="0"/>
               <a:t>SMILES </a:t>
             </a:r>
             <a:r>
-              <a:rPr lang="zh-CN" altLang="en-US"/>
+              <a:rPr lang="zh-CN" altLang="en-US" dirty="0"/>
               <a:t>身份时计为 </a:t>
             </a:r>
             <a:r>
-              <a:rPr lang="en-US" altLang="zh-CN"/>
-              <a:t>Find+Match </a:t>
-            </a:r>
-            <a:r>
-              <a:rPr lang="zh-CN" altLang="en-US"/>
+              <a:rPr lang="en-US" altLang="zh-CN" dirty="0" err="1"/>
+              <a:t>Find+Match</a:t>
+            </a:r>
+            <a:r>
+              <a:rPr lang="en-US" altLang="zh-CN" dirty="0"/>
+              <a:t> </a:t>
+            </a:r>
+            <a:r>
+              <a:rPr lang="zh-CN" altLang="en-US" dirty="0"/>
               <a:t>成功。纵轴为成功 </a:t>
             </a:r>
             <a:r>
-              <a:rPr lang="en-US" altLang="zh-CN"/>
+              <a:rPr lang="en-US" altLang="zh-CN" dirty="0"/>
               <a:t>PDB </a:t>
             </a:r>
             <a:r>
-              <a:rPr lang="zh-CN" altLang="en-US"/>
+              <a:rPr lang="zh-CN" altLang="en-US" dirty="0"/>
               <a:t>比例，</a:t>
             </a:r>
             <a:r>
-              <a:rPr lang="en-US" altLang="zh-CN"/>
+              <a:rPr lang="en-US" altLang="zh-CN" dirty="0"/>
               <a:t>K=1–10</a:t>
             </a:r>
             <a:r>
-              <a:rPr lang="zh-CN" altLang="en-US"/>
+              <a:rPr lang="zh-CN" altLang="en-US" dirty="0"/>
               <a:t>。</a:t>
             </a:r>
             <a:r>
-              <a:rPr lang="en-US" altLang="zh-CN"/>
+              <a:rPr lang="en-US" altLang="zh-CN" dirty="0"/>
               <a:t>GT </a:t>
             </a:r>
             <a:r>
-              <a:rPr lang="zh-CN" altLang="en-US"/>
+              <a:rPr lang="zh-CN" altLang="en-US" dirty="0"/>
               <a:t>与 </a:t>
             </a:r>
             <a:r>
-              <a:rPr lang="en-US" altLang="zh-CN"/>
+              <a:rPr lang="en-US" altLang="zh-CN" dirty="0"/>
               <a:t>CA2 </a:t>
             </a:r>
             <a:r>
-              <a:rPr lang="zh-CN" altLang="en-US"/>
+              <a:rPr lang="zh-CN" altLang="en-US" dirty="0"/>
               <a:t>分别使用真实受体与 </a:t>
             </a:r>
             <a:r>
-              <a:rPr lang="en-US" altLang="zh-CN"/>
+              <a:rPr lang="en-US" altLang="zh-CN" dirty="0"/>
               <a:t>CryoAtom2 </a:t>
             </a:r>
             <a:r>
-              <a:rPr lang="zh-CN" altLang="en-US"/>
+              <a:rPr lang="zh-CN" altLang="en-US" dirty="0"/>
               <a:t>受体及其对应模拟密度，两者共用实验密度；</a:t>
             </a:r>
             <a:r>
-              <a:rPr lang="en-US" altLang="zh-CN"/>
+              <a:rPr lang="en-US" altLang="zh-CN" dirty="0"/>
               <a:t>Emap2lig-Find </a:t>
             </a:r>
             <a:r>
-              <a:rPr lang="zh-CN" altLang="en-US"/>
+              <a:rPr lang="zh-CN" altLang="en-US" dirty="0"/>
               <a:t>不使用受体，按自身位点得分排序。</a:t>
             </a:r>
           </a:p>
